--- a/智能学习助手_企业实训课程答辩汇报_最终版.pptx
+++ b/智能学习助手_企业实训课程答辩汇报_最终版.pptx
@@ -3948,7 +3948,7 @@
                 </a:solidFill>
                 <a:latin typeface="微软雅黑" panose="020B0503020204020204" charset="-122"/>
               </a:rPr>
-              <a:t>5 学分暑期企业实训课程  |  指导教师：___</a:t>
+              <a:t>暑期企业实训课程  |  指导教师：___</a:t>
             </a:r>
             <a:r>
               <a:rPr lang="zh-CN" sz="970" b="0">
@@ -3966,7 +3966,25 @@
                 </a:solidFill>
                 <a:latin typeface="微软雅黑" panose="020B0503020204020204" charset="-122"/>
               </a:rPr>
-              <a:t>_________  |  汇报日期：____________</a:t>
+              <a:t>_________  |  汇报日期：______</a:t>
+            </a:r>
+            <a:r>
+              <a:rPr lang="en-US" sz="970" b="0">
+                <a:solidFill>
+                  <a:srgbClr val="697891"/>
+                </a:solidFill>
+                <a:latin typeface="微软雅黑" panose="020B0503020204020204" charset="-122"/>
+              </a:rPr>
+              <a:t>2026.7.31</a:t>
+            </a:r>
+            <a:r>
+              <a:rPr sz="970" b="0">
+                <a:solidFill>
+                  <a:srgbClr val="697891"/>
+                </a:solidFill>
+                <a:latin typeface="微软雅黑" panose="020B0503020204020204" charset="-122"/>
+              </a:rPr>
+              <a:t>______</a:t>
             </a:r>
             <a:endParaRPr sz="970" b="0">
               <a:solidFill>
@@ -10592,7 +10610,7 @@
                 </a:solidFill>
                 <a:latin typeface="微软雅黑" panose="020B0503020204020204" charset="-122"/>
               </a:rPr>
-              <a:t>备用答辩 01</a:t>
+              <a:t>备用01</a:t>
             </a:r>
             <a:endParaRPr sz="820" b="1">
               <a:solidFill>
@@ -10638,47 +10656,6 @@
             <a:endParaRPr sz="2400" b="1">
               <a:solidFill>
                 <a:srgbClr val="1A3052"/>
-              </a:solidFill>
-              <a:latin typeface="微软雅黑" panose="020B0503020204020204" charset="-122"/>
-            </a:endParaRPr>
-          </a:p>
-        </p:txBody>
-      </p:sp>
-      <p:sp>
-        <p:nvSpPr>
-          <p:cNvPr id="5" name="TextBox 4"/>
-          <p:cNvSpPr txBox="1"/>
-          <p:nvPr/>
-        </p:nvSpPr>
-        <p:spPr>
-          <a:xfrm>
-            <a:off x="713232" y="1115568"/>
-            <a:ext cx="10241280" cy="219456"/>
-          </a:xfrm>
-          <a:prstGeom prst="rect">
-            <a:avLst/>
-          </a:prstGeom>
-          <a:noFill/>
-        </p:spPr>
-        <p:txBody>
-          <a:bodyPr wrap="square" lIns="27432" tIns="18288" rIns="27432">
-            <a:spAutoFit/>
-          </a:bodyPr>
-          <a:lstStyle/>
-          <a:p>
-            <a:pPr algn="l"/>
-            <a:r>
-              <a:rPr sz="1030" b="0">
-                <a:solidFill>
-                  <a:srgbClr val="697891"/>
-                </a:solidFill>
-                <a:latin typeface="微软雅黑" panose="020B0503020204020204" charset="-122"/>
-              </a:rPr>
-              <a:t>仅在老师追问技术选型时展示</a:t>
-            </a:r>
-            <a:endParaRPr sz="1030" b="0">
-              <a:solidFill>
-                <a:srgbClr val="697891"/>
               </a:solidFill>
               <a:latin typeface="微软雅黑" panose="020B0503020204020204" charset="-122"/>
             </a:endParaRPr>
@@ -11905,7 +11882,7 @@
                 </a:solidFill>
                 <a:latin typeface="微软雅黑" panose="020B0503020204020204" charset="-122"/>
               </a:rPr>
-              <a:t>备用答辩 02</a:t>
+              <a:t>备用 02</a:t>
             </a:r>
             <a:endParaRPr sz="820" b="1">
               <a:solidFill>
@@ -12974,7 +12951,7 @@
                 </a:solidFill>
                 <a:latin typeface="微软雅黑" panose="020B0503020204020204" charset="-122"/>
               </a:rPr>
-              <a:t>备用答辩 03</a:t>
+              <a:t>备用03</a:t>
             </a:r>
             <a:endParaRPr sz="820" b="1">
               <a:solidFill>
